--- a/mp4/welcome_slide.pptx
+++ b/mp4/welcome_slide.pptx
@@ -104,6 +104,11 @@
       </a:defRPr>
     </a:lvl9pPr>
   </p:defaultTextStyle>
+  <p:extLst>
+    <p:ext uri="{EFAFB233-063F-42B5-8137-9DF3F51BA10A}">
+      <p15:sldGuideLst xmlns:p15="http://schemas.microsoft.com/office/powerpoint/2012/main"/>
+    </p:ext>
+  </p:extLst>
 </p:presentation>
 </file>
 
@@ -3323,17 +3328,25 @@
       </p:grpSpPr>
       <p:pic>
         <p:nvPicPr>
-          <p:cNvPr id="5" name="Picture 4" descr="A group of colored pencils on a wood surface&#10;&#10;AI-generated content may be incorrect.">
-            <a:extLst>
-              <a:ext uri="{FF2B5EF4-FFF2-40B4-BE49-F238E27FC236}">
-                <a16:creationId xmlns:a16="http://schemas.microsoft.com/office/drawing/2014/main" id="{12AB8515-4805-5E44-2AEE-8350D22AC7D7}"/>
+          <p:cNvPr id="2" name="background_welcome.mp3">
+            <a:hlinkClick r:id="" action="ppaction://media"/>
+            <a:extLst>
+              <a:ext uri="{FF2B5EF4-FFF2-40B4-BE49-F238E27FC236}">
+                <a16:creationId xmlns:a16="http://schemas.microsoft.com/office/drawing/2014/main" id="{ACDE3154-2043-D617-B6FF-A475E7201F45}"/>
               </a:ext>
             </a:extLst>
           </p:cNvPr>
           <p:cNvPicPr>
             <a:picLocks noChangeAspect="1"/>
           </p:cNvPicPr>
-          <p:nvPr/>
+          <p:nvPr>
+            <a:audioFile r:link="rId3"/>
+            <p:extLst>
+              <p:ext uri="{DAA4B4D4-6D71-4841-9C94-3DE7FCFB9230}">
+                <p14:media xmlns:p14="http://schemas.microsoft.com/office/powerpoint/2010/main" r:embed="rId2"/>
+              </p:ext>
+            </p:extLst>
+          </p:nvPr>
         </p:nvPicPr>
         <p:blipFill>
           <a:blip r:embed="rId5"/>
@@ -3343,8 +3356,8 @@
         </p:blipFill>
         <p:spPr>
           <a:xfrm>
-            <a:off x="0" y="2120"/>
-            <a:ext cx="12195774" cy="6855880"/>
+            <a:off x="571062" y="5902434"/>
+            <a:ext cx="812800" cy="812800"/>
           </a:xfrm>
           <a:prstGeom prst="rect">
             <a:avLst/>
@@ -3353,25 +3366,17 @@
       </p:pic>
       <p:pic>
         <p:nvPicPr>
-          <p:cNvPr id="8" name="background_welcome.mp3">
-            <a:hlinkClick r:id="" action="ppaction://media"/>
-            <a:extLst>
-              <a:ext uri="{FF2B5EF4-FFF2-40B4-BE49-F238E27FC236}">
-                <a16:creationId xmlns:a16="http://schemas.microsoft.com/office/drawing/2014/main" id="{8AC3968F-5E4C-D7F6-4D15-819097D31BF4}"/>
+          <p:cNvPr id="5" name="Picture 4" descr="A group of colored pencils on a wood surface&#10;&#10;AI-generated content may be incorrect.">
+            <a:extLst>
+              <a:ext uri="{FF2B5EF4-FFF2-40B4-BE49-F238E27FC236}">
+                <a16:creationId xmlns:a16="http://schemas.microsoft.com/office/drawing/2014/main" id="{12AB8515-4805-5E44-2AEE-8350D22AC7D7}"/>
               </a:ext>
             </a:extLst>
           </p:cNvPr>
           <p:cNvPicPr>
             <a:picLocks noChangeAspect="1"/>
           </p:cNvPicPr>
-          <p:nvPr>
-            <a:audioFile r:link="rId3"/>
-            <p:extLst>
-              <p:ext uri="{DAA4B4D4-6D71-4841-9C94-3DE7FCFB9230}">
-                <p14:media xmlns:p14="http://schemas.microsoft.com/office/powerpoint/2010/main" r:embed="rId2"/>
-              </p:ext>
-            </p:extLst>
-          </p:nvPr>
+          <p:nvPr/>
         </p:nvPicPr>
         <p:blipFill>
           <a:blip r:embed="rId6"/>
@@ -3381,8 +3386,8 @@
         </p:blipFill>
         <p:spPr>
           <a:xfrm>
-            <a:off x="297793" y="5860393"/>
-            <a:ext cx="812800" cy="812800"/>
+            <a:off x="0" y="2120"/>
+            <a:ext cx="12195774" cy="6855880"/>
           </a:xfrm>
           <a:prstGeom prst="rect">
             <a:avLst/>
@@ -3404,10 +3409,10 @@
   </p:clrMapOvr>
   <mc:AlternateContent xmlns:mc="http://schemas.openxmlformats.org/markup-compatibility/2006">
     <mc:Choice xmlns:p14="http://schemas.microsoft.com/office/powerpoint/2010/main" Requires="p14">
-      <p:transition spd="slow" p14:dur="2000" advTm="9325"/>
+      <p:transition spd="slow" p14:dur="2000" advTm="10321"/>
     </mc:Choice>
     <mc:Fallback>
-      <p:transition spd="slow" advTm="9325"/>
+      <p:transition spd="slow" advTm="10321"/>
     </mc:Fallback>
   </mc:AlternateContent>
   <p:timing>
@@ -3438,9 +3443,9 @@
                                   <p:childTnLst>
                                     <p:cmd type="call" cmd="playFrom(0.0)">
                                       <p:cBhvr>
-                                        <p:cTn id="6" dur="8411" fill="hold"/>
+                                        <p:cTn id="6" dur="8672" fill="hold"/>
                                         <p:tgtEl>
-                                          <p:spTgt spid="8"/>
+                                          <p:spTgt spid="2"/>
                                         </p:tgtEl>
                                       </p:cBhvr>
                                     </p:cmd>
@@ -3485,7 +3490,7 @@
                   </p:endCondLst>
                 </p:cTn>
                 <p:tgtEl>
-                  <p:spTgt spid="8"/>
+                  <p:spTgt spid="2"/>
                 </p:tgtEl>
               </p:cMediaNode>
             </p:audio>
@@ -3497,8 +3502,8 @@
   <p:extLst>
     <p:ext uri="{E180D4A7-C9FB-4DFB-919C-405C955672EB}">
       <p14:showEvtLst xmlns:p14="http://schemas.microsoft.com/office/powerpoint/2010/main">
-        <p14:playEvt time="408" objId="8"/>
-        <p14:stopEvt time="9325" objId="8"/>
+        <p14:playEvt time="467" objId="2"/>
+        <p14:stopEvt time="10321" objId="2"/>
       </p14:showEvtLst>
     </p:ext>
   </p:extLst>
